--- a/slides/interim.pptx
+++ b/slides/interim.pptx
@@ -3890,11 +3890,65 @@
               </a:defRPr>
             </a:pPr>
             <a:r>
-              <a:t>– EDA stats fill in automatically after running ml/eda/run_eda.py.</a:t>
-            </a:r>
-          </a:p>
-        </p:txBody>
-      </p:sp>
+              <a:t>– Scale: 30 personas · 22 histories · 170 (history, incoming, target) pairs.</a:t>
+            </a:r>
+          </a:p>
+          <a:p>
+            <a:pPr lvl="1">
+              <a:spcAft>
+                <a:spcPts val="600"/>
+              </a:spcAft>
+              <a:defRPr sz="1300">
+                <a:solidFill>
+                  <a:srgbClr val="4A5568"/>
+                </a:solidFill>
+              </a:defRPr>
+            </a:pPr>
+            <a:r>
+              <a:t>– Target reply length: mean 50.2 chars (median 41.0, range 1–213).</a:t>
+            </a:r>
+          </a:p>
+          <a:p>
+            <a:pPr lvl="1">
+              <a:spcAft>
+                <a:spcPts val="600"/>
+              </a:spcAft>
+              <a:defRPr sz="1300">
+                <a:solidFill>
+                  <a:srgbClr val="4A5568"/>
+                </a:solidFill>
+              </a:defRPr>
+            </a:pPr>
+            <a:r>
+              <a:t>– History message length: mean 39.5 chars over 461 messages.</a:t>
+            </a:r>
+          </a:p>
+        </p:txBody>
+      </p:sp>
+      <p:pic>
+        <p:nvPicPr>
+          <p:cNvPr id="4" name="Picture 3" descr="lang_dist.png"/>
+          <p:cNvPicPr>
+            <a:picLocks noChangeAspect="1"/>
+          </p:cNvPicPr>
+          <p:nvPr/>
+        </p:nvPicPr>
+        <p:blipFill>
+          <a:blip r:embed="rId2"/>
+          <a:stretch>
+            <a:fillRect/>
+          </a:stretch>
+        </p:blipFill>
+        <p:spPr>
+          <a:xfrm>
+            <a:off x="6858000" y="1280160"/>
+            <a:ext cx="4937760" cy="2821577"/>
+          </a:xfrm>
+          <a:prstGeom prst="rect">
+            <a:avLst/>
+          </a:prstGeom>
+        </p:spPr>
+      </p:pic>
     </p:spTree>
   </p:cSld>
   <p:clrMapOvr>
@@ -4001,6 +4055,30 @@
           </a:p>
         </p:txBody>
       </p:sp>
+      <p:pic>
+        <p:nvPicPr>
+          <p:cNvPr id="4" name="Picture 3" descr="target_len.png"/>
+          <p:cNvPicPr>
+            <a:picLocks noChangeAspect="1"/>
+          </p:cNvPicPr>
+          <p:nvPr/>
+        </p:nvPicPr>
+        <p:blipFill>
+          <a:blip r:embed="rId2"/>
+          <a:stretch>
+            <a:fillRect/>
+          </a:stretch>
+        </p:blipFill>
+        <p:spPr>
+          <a:xfrm>
+            <a:off x="6858000" y="1280160"/>
+            <a:ext cx="4937760" cy="2821577"/>
+          </a:xfrm>
+          <a:prstGeom prst="rect">
+            <a:avLst/>
+          </a:prstGeom>
+        </p:spPr>
+      </p:pic>
     </p:spTree>
   </p:cSld>
   <p:clrMapOvr>
@@ -4249,7 +4327,7 @@
                         <a:defRPr sz="1100"/>
                       </a:pPr>
                       <a:r>
-                        <a:t>pending</a:t>
+                        <a:t>41.7%</a:t>
                       </a:r>
                     </a:p>
                   </a:txBody>
@@ -4264,7 +4342,7 @@
                         <a:defRPr sz="1100"/>
                       </a:pPr>
                       <a:r>
-                        <a:t>pending</a:t>
+                        <a:t>[27,58]%</a:t>
                       </a:r>
                     </a:p>
                   </a:txBody>
@@ -4279,17 +4357,24 @@
                         <a:defRPr sz="1100"/>
                       </a:pPr>
                       <a:r>
-                        <a:t>pending</a:t>
-                      </a:r>
-                    </a:p>
-                  </a:txBody>
-                  <a:tcPr/>
-                </a:tc>
-                <a:tc>
-                  <a:txBody>
-                    <a:bodyPr/>
-                    <a:lstStyle/>
-                    <a:p/>
+                        <a:t>0.905</a:t>
+                      </a:r>
+                    </a:p>
+                  </a:txBody>
+                  <a:tcPr/>
+                </a:tc>
+                <a:tc>
+                  <a:txBody>
+                    <a:bodyPr/>
+                    <a:lstStyle/>
+                    <a:p>
+                      <a:pPr>
+                        <a:defRPr sz="1100"/>
+                      </a:pPr>
+                      <a:r>
+                        <a:t>3.39</a:t>
+                      </a:r>
+                    </a:p>
                   </a:txBody>
                   <a:tcPr/>
                 </a:tc>
@@ -4319,7 +4404,7 @@
                         <a:defRPr sz="1100"/>
                       </a:pPr>
                       <a:r>
-                        <a:t>pending</a:t>
+                        <a:t>52.8%</a:t>
                       </a:r>
                     </a:p>
                   </a:txBody>
@@ -4334,7 +4419,7 @@
                         <a:defRPr sz="1100"/>
                       </a:pPr>
                       <a:r>
-                        <a:t>pending</a:t>
+                        <a:t>[37,68]%</a:t>
                       </a:r>
                     </a:p>
                   </a:txBody>
@@ -4349,17 +4434,24 @@
                         <a:defRPr sz="1100"/>
                       </a:pPr>
                       <a:r>
-                        <a:t>pending</a:t>
-                      </a:r>
-                    </a:p>
-                  </a:txBody>
-                  <a:tcPr/>
-                </a:tc>
-                <a:tc>
-                  <a:txBody>
-                    <a:bodyPr/>
-                    <a:lstStyle/>
-                    <a:p/>
+                        <a:t>0.902</a:t>
+                      </a:r>
+                    </a:p>
+                  </a:txBody>
+                  <a:tcPr/>
+                </a:tc>
+                <a:tc>
+                  <a:txBody>
+                    <a:bodyPr/>
+                    <a:lstStyle/>
+                    <a:p>
+                      <a:pPr>
+                        <a:defRPr sz="1100"/>
+                      </a:pPr>
+                      <a:r>
+                        <a:t>3.56</a:t>
+                      </a:r>
+                    </a:p>
                   </a:txBody>
                   <a:tcPr/>
                 </a:tc>
@@ -4389,7 +4481,7 @@
                         <a:defRPr sz="1100"/>
                       </a:pPr>
                       <a:r>
-                        <a:t>GPU run</a:t>
+                        <a:t>pending (GPU)</a:t>
                       </a:r>
                     </a:p>
                   </a:txBody>
@@ -4429,7 +4521,14 @@
                   <a:txBody>
                     <a:bodyPr/>
                     <a:lstStyle/>
-                    <a:p/>
+                    <a:p>
+                      <a:pPr>
+                        <a:defRPr sz="1100"/>
+                      </a:pPr>
+                      <a:r>
+                        <a:t>—</a:t>
+                      </a:r>
+                    </a:p>
                   </a:txBody>
                   <a:tcPr/>
                 </a:tc>
@@ -4438,9 +4537,33 @@
           </a:graphicData>
         </a:graphic>
       </p:graphicFrame>
-      <p:sp>
-        <p:nvSpPr>
-          <p:cNvPr id="5" name="TextBox 4"/>
+      <p:pic>
+        <p:nvPicPr>
+          <p:cNvPr id="5" name="Picture 4" descr="indist_accuracy.png"/>
+          <p:cNvPicPr>
+            <a:picLocks noChangeAspect="1"/>
+          </p:cNvPicPr>
+          <p:nvPr/>
+        </p:nvPicPr>
+        <p:blipFill>
+          <a:blip r:embed="rId2"/>
+          <a:stretch>
+            <a:fillRect/>
+          </a:stretch>
+        </p:blipFill>
+        <p:spPr>
+          <a:xfrm>
+            <a:off x="6858000" y="1280160"/>
+            <a:ext cx="4937760" cy="3174274"/>
+          </a:xfrm>
+          <a:prstGeom prst="rect">
+            <a:avLst/>
+          </a:prstGeom>
+        </p:spPr>
+      </p:pic>
+      <p:sp>
+        <p:nvSpPr>
+          <p:cNvPr id="6" name="TextBox 5"/>
           <p:cNvSpPr txBox="1"/>
           <p:nvPr/>
         </p:nvSpPr>
@@ -4468,7 +4591,7 @@
               </a:defRPr>
             </a:pPr>
             <a:r>
-              <a:t>Numbers populate after running eval.run_all.</a:t>
+              <a:t>Real baseline numbers (zero/few-shot via Groq). fine_tuned = run on GPU.</a:t>
             </a:r>
           </a:p>
         </p:txBody>
